--- a/lci_cvport.pptx
+++ b/lci_cvport.pptx
@@ -4620,7 +4620,7 @@
             </a:pPr>
             <a:r>
               <a:rPr/>
-              <a:t>Surgeons</a:t>
+              <a:t>Surgeon</a:t>
             </a:r>
           </a:p>
           <a:p>
@@ -4628,20 +4628,6 @@
             <a:r>
               <a:rPr/>
               <a:t>Jonathan Salo MD</a:t>
-            </a:r>
-          </a:p>
-          <a:p>
-            <a:pPr lvl="0"/>
-            <a:r>
-              <a:rPr/>
-              <a:t>Jeffrey Hagen MD</a:t>
-            </a:r>
-          </a:p>
-          <a:p>
-            <a:pPr lvl="0"/>
-            <a:r>
-              <a:rPr/>
-              <a:t>Michael Roach MD</a:t>
             </a:r>
           </a:p>
         </p:txBody>
